--- a/docs/M2_Apresentacao_CronotaScan.pptx
+++ b/docs/M2_Apresentacao_CronotaScan.pptx
@@ -4317,7 +4317,7 @@
                 </a:solidFill>
                 <a:latin typeface="Calibri"/>
               </a:rPr>
-              <a:t>Engenharia de Software II  ·  Itajaí  ·  23 de outubro de 2026</a:t>
+              <a:t>Engenharia de Software II  ·  Itajaí  ·  22 de outubro de 2026</a:t>
             </a:r>
           </a:p>
         </p:txBody>
